--- a/生成的课件/03_管理经济学_第03章_需求估计和需求预测.pptx
+++ b/生成的课件/03_管理经济学_第03章_需求估计和需求预测.pptx
@@ -3966,7 +3966,7 @@
                 <a:latin typeface="Times New Roman"/>
                 <a:ea typeface="宋体"/>
               </a:rPr>
-              <a:t>  1. 关键变量遗漏与多重共线性</a:t>
+              <a:t>1. 关键变量遗漏与多重共线性</a:t>
             </a:r>
           </a:p>
         </p:txBody>
@@ -4009,7 +4009,7 @@
                 <a:latin typeface="Times New Roman"/>
                 <a:ea typeface="宋体"/>
               </a:rPr>
-              <a:t>（1）遗漏关键变量偏误： </a:t>
+              <a:t>（1）遗漏关键变量偏误：</a:t>
             </a:r>
             <a:r>
               <a:rPr sz="1200" b="0">
@@ -4039,7 +4039,7 @@
                 <a:latin typeface="Times New Roman"/>
                 <a:ea typeface="宋体"/>
               </a:rPr>
-              <a:t>（2）多重共线性（Multicollinearity）： </a:t>
+              <a:t>（2）多重共线性（Multicollinearity）：</a:t>
             </a:r>
             <a:r>
               <a:rPr sz="1200" b="0">
@@ -4149,7 +4149,7 @@
                 <a:latin typeface="Times New Roman"/>
                 <a:ea typeface="宋体"/>
               </a:rPr>
-              <a:t>  2. 序列自相关与异方差</a:t>
+              <a:t>2. 序列自相关与异方差</a:t>
             </a:r>
           </a:p>
         </p:txBody>
@@ -4192,7 +4192,7 @@
                 <a:latin typeface="Times New Roman"/>
                 <a:ea typeface="宋体"/>
               </a:rPr>
-              <a:t>（3）序列自相关（Autocorrelation）： </a:t>
+              <a:t>（3）序列自相关（Autocorrelation）：</a:t>
             </a:r>
             <a:r>
               <a:rPr sz="1200" b="0">
@@ -4222,7 +4222,7 @@
                 <a:latin typeface="Times New Roman"/>
                 <a:ea typeface="宋体"/>
               </a:rPr>
-              <a:t>（4）异方差性（Heteroscedasticity）： </a:t>
+              <a:t>（4）异方差性（Heteroscedasticity）：</a:t>
             </a:r>
             <a:r>
               <a:rPr sz="1200" b="0">
@@ -4332,7 +4332,7 @@
                 <a:latin typeface="Times New Roman"/>
                 <a:ea typeface="宋体"/>
               </a:rPr>
-              <a:t>  3. 内生性联立方程偏误</a:t>
+              <a:t>3. 内生性联立方程偏误</a:t>
             </a:r>
           </a:p>
         </p:txBody>
@@ -4375,7 +4375,7 @@
                 <a:latin typeface="Times New Roman"/>
                 <a:ea typeface="宋体"/>
               </a:rPr>
-              <a:t>（5）联立因果识别陷阱： </a:t>
+              <a:t>（5）联立因果识别陷阱：</a:t>
             </a:r>
             <a:r>
               <a:rPr sz="1200" b="0">
@@ -4442,7 +4442,7 @@
                 <a:latin typeface="Times New Roman"/>
                 <a:ea typeface="宋体"/>
               </a:rPr>
-              <a:t>  ★ 核心要点：识别并规避五大计量陷阱，是确保企业计量模型具备真实商业预测力的专业分水岭。</a:t>
+              <a:t>★ 核心要点：识别并规避五大计量陷阱，是确保企业计量模型具备真实商业预测力的专业分水岭。</a:t>
             </a:r>
           </a:p>
         </p:txBody>
@@ -4849,7 +4849,7 @@
                 <a:latin typeface="Times New Roman"/>
                 <a:ea typeface="宋体"/>
               </a:rPr>
-              <a:t>  1. Excel 数据分析工具箱操作流程</a:t>
+              <a:t>1. Excel 数据分析工具箱操作流程</a:t>
             </a:r>
           </a:p>
         </p:txBody>
@@ -4892,7 +4892,7 @@
                 <a:latin typeface="Times New Roman"/>
                 <a:ea typeface="宋体"/>
               </a:rPr>
-              <a:t>（1）数据录入规范： </a:t>
+              <a:t>（1）数据录入规范：</a:t>
             </a:r>
             <a:r>
               <a:rPr sz="1250" b="0">
@@ -4902,7 +4902,7 @@
                 <a:latin typeface="Times New Roman"/>
                 <a:ea typeface="宋体"/>
               </a:rPr>
-              <a:t>在表格中按列整齐排列因变量 Y（销售量）与各列自变量 X_1, X_2（价格、广告、收入）。</a:t>
+              <a:t>在表格中按列整齐排列因变量 Y（销售量）与各列自变量 X₁, X₂（价格、广告、收入）。</a:t>
             </a:r>
           </a:p>
           <a:p>
@@ -4922,7 +4922,7 @@
                 <a:latin typeface="Times New Roman"/>
                 <a:ea typeface="宋体"/>
               </a:rPr>
-              <a:t>（2）加载回归模块： </a:t>
+              <a:t>（2）加载回归模块：</a:t>
             </a:r>
             <a:r>
               <a:rPr sz="1250" b="0">
@@ -4932,7 +4932,7 @@
                 <a:latin typeface="Times New Roman"/>
                 <a:ea typeface="宋体"/>
               </a:rPr>
-              <a:t>依次点击【数据】\to 【数据分析】\to 【回归】，选定 Y 值输入区域与 X 值输入区域。</a:t>
+              <a:t>依次点击【数据】 → 【数据分析】 → 【回归】，选定 Y 值输入区域与 X 值输入区域。</a:t>
             </a:r>
           </a:p>
           <a:p>
@@ -4952,7 +4952,7 @@
                 <a:latin typeface="Times New Roman"/>
                 <a:ea typeface="宋体"/>
               </a:rPr>
-              <a:t>（3）勾选输出选项： </a:t>
+              <a:t>（3）勾选输出选项：</a:t>
             </a:r>
             <a:r>
               <a:rPr sz="1250" b="0">
@@ -5062,7 +5062,7 @@
                 <a:latin typeface="Times New Roman"/>
                 <a:ea typeface="宋体"/>
               </a:rPr>
-              <a:t>  2. 报表三层核心指标精读</a:t>
+              <a:t>2. 报表三层核心指标精读</a:t>
             </a:r>
           </a:p>
         </p:txBody>
@@ -5105,7 +5105,7 @@
                 <a:latin typeface="Times New Roman"/>
                 <a:ea typeface="宋体"/>
               </a:rPr>
-              <a:t>（1）回归统计表（顶部）： </a:t>
+              <a:t>（1）回归统计表（顶部）：</a:t>
             </a:r>
             <a:r>
               <a:rPr sz="1250" b="0">
@@ -5135,7 +5135,7 @@
                 <a:latin typeface="Times New Roman"/>
                 <a:ea typeface="宋体"/>
               </a:rPr>
-              <a:t>（2）方差分析表 ANOVA（中部）： </a:t>
+              <a:t>（2）方差分析表 ANOVA（中部）：</a:t>
             </a:r>
             <a:r>
               <a:rPr sz="1250" b="0">
@@ -5165,7 +5165,7 @@
                 <a:latin typeface="Times New Roman"/>
                 <a:ea typeface="宋体"/>
               </a:rPr>
-              <a:t>（3）参数估计表（底部）： </a:t>
+              <a:t>（3）参数估计表（底部）：</a:t>
             </a:r>
             <a:r>
               <a:rPr sz="1250" b="0">
@@ -5232,7 +5232,7 @@
                 <a:latin typeface="Times New Roman"/>
                 <a:ea typeface="宋体"/>
               </a:rPr>
-              <a:t>  ★ 核心要点：掌握 Excel 回归报表精读技能，赋能管理者在 5 分钟内完成企业经营数据的实证计量分析。</a:t>
+              <a:t>★ 核心要点：掌握 Excel 回归报表精读技能，赋能管理者在 5 分钟内完成企业经营数据的实证计量分析。</a:t>
             </a:r>
           </a:p>
         </p:txBody>
@@ -5946,7 +5946,7 @@
                 <a:latin typeface="Times New Roman"/>
                 <a:ea typeface="宋体"/>
               </a:rPr>
-              <a:t>  1. 德尔菲法定性预测四大核心特征</a:t>
+              <a:t>1. 德尔菲法定性预测四大核心特征</a:t>
             </a:r>
           </a:p>
         </p:txBody>
@@ -5989,7 +5989,7 @@
                 <a:latin typeface="Times New Roman"/>
                 <a:ea typeface="宋体"/>
               </a:rPr>
-              <a:t>（1）匿名背靠背（Anonymity）： </a:t>
+              <a:t>（1）匿名背靠背（Anonymity）：</a:t>
             </a:r>
             <a:r>
               <a:rPr sz="1250" b="0">
@@ -6019,7 +6019,7 @@
                 <a:latin typeface="Times New Roman"/>
                 <a:ea typeface="宋体"/>
               </a:rPr>
-              <a:t>（2）多轮循环反馈（Iteration with Feedback）： </a:t>
+              <a:t>（2）多轮循环反馈（Iteration with Feedback）：</a:t>
             </a:r>
             <a:r>
               <a:rPr sz="1250" b="0">
@@ -6049,7 +6049,7 @@
                 <a:latin typeface="Times New Roman"/>
                 <a:ea typeface="宋体"/>
               </a:rPr>
-              <a:t>（3）定量统计归纳（Statistical Convergence）： </a:t>
+              <a:t>（3）定量统计归纳（Statistical Convergence）：</a:t>
             </a:r>
             <a:r>
               <a:rPr sz="1250" b="0">
@@ -6079,7 +6079,7 @@
                 <a:latin typeface="Times New Roman"/>
                 <a:ea typeface="宋体"/>
               </a:rPr>
-              <a:t>（4）专家主观判断力赋能： </a:t>
+              <a:t>（4）专家主观判断力赋能：</a:t>
             </a:r>
             <a:r>
               <a:rPr sz="1250" b="0">
@@ -6189,7 +6189,7 @@
                 <a:latin typeface="Times New Roman"/>
                 <a:ea typeface="宋体"/>
               </a:rPr>
-              <a:t>  2. 德尔菲法四步标准化实施流程</a:t>
+              <a:t>2. 德尔菲法四步标准化实施流程</a:t>
             </a:r>
           </a:p>
         </p:txBody>
@@ -6232,7 +6232,7 @@
                 <a:latin typeface="Times New Roman"/>
                 <a:ea typeface="宋体"/>
               </a:rPr>
-              <a:t>（1）第一轮（开放征询）： </a:t>
+              <a:t>（1）第一轮（开放征询）：</a:t>
             </a:r>
             <a:r>
               <a:rPr sz="1250" b="0">
@@ -6262,7 +6262,7 @@
                 <a:latin typeface="Times New Roman"/>
                 <a:ea typeface="宋体"/>
               </a:rPr>
-              <a:t>（2）第二轮（初选归纳）： </a:t>
+              <a:t>（2）第二轮（初选归纳）：</a:t>
             </a:r>
             <a:r>
               <a:rPr sz="1250" b="0">
@@ -6292,7 +6292,7 @@
                 <a:latin typeface="Times New Roman"/>
                 <a:ea typeface="宋体"/>
               </a:rPr>
-              <a:t>（3）第三轮（分歧陈述）： </a:t>
+              <a:t>（3）第三轮（分歧陈述）：</a:t>
             </a:r>
             <a:r>
               <a:rPr sz="1250" b="0">
@@ -6322,7 +6322,7 @@
                 <a:latin typeface="Times New Roman"/>
                 <a:ea typeface="宋体"/>
               </a:rPr>
-              <a:t>（4）第四轮（最终收敛）： </a:t>
+              <a:t>（4）第四轮（最终收敛）：</a:t>
             </a:r>
             <a:r>
               <a:rPr sz="1250" b="0">
@@ -6389,7 +6389,7 @@
                 <a:latin typeface="Times New Roman"/>
                 <a:ea typeface="宋体"/>
               </a:rPr>
-              <a:t>  ★ 核心要点：德尔菲法是将专家群体智慧转化为可靠战略预测的最经典定性决策工具。</a:t>
+              <a:t>★ 核心要点：德尔菲法是将专家群体智慧转化为可靠战略预测的最经典定性决策工具。</a:t>
             </a:r>
           </a:p>
         </p:txBody>
@@ -6796,7 +6796,7 @@
                 <a:latin typeface="Times New Roman"/>
                 <a:ea typeface="宋体"/>
               </a:rPr>
-              <a:t>  1. 简单移动平均法（Simple Moving Average）</a:t>
+              <a:t>1. 简单移动平均法（Simple Moving Average）</a:t>
             </a:r>
           </a:p>
         </p:txBody>
@@ -6839,7 +6839,7 @@
                 <a:latin typeface="Times New Roman"/>
                 <a:ea typeface="宋体"/>
               </a:rPr>
-              <a:t>（1）计算公式： </a:t>
+              <a:t>（1）计算公式：</a:t>
             </a:r>
             <a:r>
               <a:rPr sz="1250" b="0">
@@ -6849,7 +6849,7 @@
                 <a:latin typeface="Times New Roman"/>
                 <a:ea typeface="宋体"/>
               </a:rPr>
-              <a:t>M_t = \frac{A_t + A_{t-1} + ... + A_{t-N+1}}{N} \quad (N: 移动期数跨度)</a:t>
+              <a:t>Mₜ = (Aₜ + Aₜ-1 + ... + Aₜ-N+1) / N (N: 移动期数跨度)</a:t>
             </a:r>
           </a:p>
           <a:p>
@@ -6869,7 +6869,7 @@
                 <a:latin typeface="Times New Roman"/>
                 <a:ea typeface="宋体"/>
               </a:rPr>
-              <a:t>（2）去噪平滑原理： </a:t>
+              <a:t>（2）去噪平滑原理：</a:t>
             </a:r>
             <a:r>
               <a:rPr sz="1250" b="0">
@@ -6899,7 +6899,7 @@
                 <a:latin typeface="Times New Roman"/>
                 <a:ea typeface="宋体"/>
               </a:rPr>
-              <a:t>（3）参数 N 的权衡： </a:t>
+              <a:t>（3）参数 N 的权衡：</a:t>
             </a:r>
             <a:r>
               <a:rPr sz="1250" b="0">
@@ -7009,7 +7009,7 @@
                 <a:latin typeface="Times New Roman"/>
                 <a:ea typeface="宋体"/>
               </a:rPr>
-              <a:t>  2. 加权移动平均法（Weighted Moving Average）</a:t>
+              <a:t>2. 加权移动平均法（Weighted Moving Average）</a:t>
             </a:r>
           </a:p>
         </p:txBody>
@@ -7052,7 +7052,7 @@
                 <a:latin typeface="Times New Roman"/>
                 <a:ea typeface="宋体"/>
               </a:rPr>
-              <a:t>（1）计算公式： </a:t>
+              <a:t>（1）计算公式：</a:t>
             </a:r>
             <a:r>
               <a:rPr sz="1250" b="0">
@@ -7062,7 +7062,7 @@
                 <a:latin typeface="Times New Roman"/>
                 <a:ea typeface="宋体"/>
               </a:rPr>
-              <a:t>WMA_t = \sum_{i=1}^N w_i A_{t-i+1} \quad (\sum w_i = 1)</a:t>
+              <a:t>WMAₜ = ∑^N wᵢ Aₜ-i+1 (∑ wᵢ = 1)</a:t>
             </a:r>
           </a:p>
           <a:p>
@@ -7082,7 +7082,7 @@
                 <a:latin typeface="Times New Roman"/>
                 <a:ea typeface="宋体"/>
               </a:rPr>
-              <a:t>（2）时间衰减赋权： </a:t>
+              <a:t>（2）时间衰减赋权：</a:t>
             </a:r>
             <a:r>
               <a:rPr sz="1250" b="0">
@@ -7092,7 +7092,7 @@
                 <a:latin typeface="Times New Roman"/>
                 <a:ea typeface="宋体"/>
               </a:rPr>
-              <a:t>赋予近期实际发生数据更高的权重（如 w_1=0.5, w_2=0.3, w_3=0.2），更好地反映近期市场突变动量。</a:t>
+              <a:t>赋予近期实际发生数据更高的权重（如 w₁=0.5, w₂=0.3, w₃=0.2），更好地反映近期市场突变动量。</a:t>
             </a:r>
           </a:p>
         </p:txBody>
@@ -7149,7 +7149,7 @@
                 <a:latin typeface="Times New Roman"/>
                 <a:ea typeface="宋体"/>
               </a:rPr>
-              <a:t>  ★ 核心要点：移动平均法计算极简且易于自动化，是企业供应链进销存短期排产的基石。</a:t>
+              <a:t>★ 核心要点：移动平均法计算极简且易于自动化，是企业供应链进销存短期排产的基石。</a:t>
             </a:r>
           </a:p>
         </p:txBody>
@@ -7556,7 +7556,7 @@
                 <a:latin typeface="Times New Roman"/>
                 <a:ea typeface="宋体"/>
               </a:rPr>
-              <a:t>  1. 单纯指数平滑法递推模型</a:t>
+              <a:t>1. 单纯指数平滑法递推模型</a:t>
             </a:r>
           </a:p>
         </p:txBody>
@@ -7599,7 +7599,7 @@
                 <a:latin typeface="Times New Roman"/>
                 <a:ea typeface="宋体"/>
               </a:rPr>
-              <a:t>（1）标准迭代公式： </a:t>
+              <a:t>（1）标准迭代公式：</a:t>
             </a:r>
             <a:r>
               <a:rPr sz="1250" b="0">
@@ -7609,7 +7609,7 @@
                 <a:latin typeface="Times New Roman"/>
                 <a:ea typeface="宋体"/>
               </a:rPr>
-              <a:t>F_{t+1} = \alpha A_t + (1 - \alpha) F_t = F_t + \alpha (A_t - F_t)</a:t>
+              <a:t>Fₜ+1 = α Aₜ + (1 - α) Fₜ = Fₜ + α (Aₜ - Fₜ)</a:t>
             </a:r>
           </a:p>
           <a:p>
@@ -7629,7 +7629,7 @@
                 <a:latin typeface="Times New Roman"/>
                 <a:ea typeface="宋体"/>
               </a:rPr>
-              <a:t>（2）经济含义： </a:t>
+              <a:t>（2）经济含义：</a:t>
             </a:r>
             <a:r>
               <a:rPr sz="1250" b="0">
@@ -7639,7 +7639,7 @@
                 <a:latin typeface="Times New Roman"/>
                 <a:ea typeface="宋体"/>
               </a:rPr>
-              <a:t>下一期预测值 = 本期预测值 + \alpha \times 本期预测误差（按误差自动修正闭环！）。</a:t>
+              <a:t>下一期预测值 = 本期预测值 + α × 本期预测误差（按误差自动修正闭环！）。</a:t>
             </a:r>
           </a:p>
           <a:p>
@@ -7659,7 +7659,7 @@
                 <a:latin typeface="Times New Roman"/>
                 <a:ea typeface="宋体"/>
               </a:rPr>
-              <a:t>（3）历史数据全息衰减： </a:t>
+              <a:t>（3）历史数据全息衰减：</a:t>
             </a:r>
             <a:r>
               <a:rPr sz="1250" b="0">
@@ -7669,7 +7669,7 @@
                 <a:latin typeface="Times New Roman"/>
                 <a:ea typeface="宋体"/>
               </a:rPr>
-              <a:t>展开后包含全部历史数据，其权重以指数几何级数 \alpha(1-\alpha)^k 随时间回溯加速衰减。</a:t>
+              <a:t>展开后包含全部历史数据，其权重以指数几何级数 α(1-α)^k 随时间回溯加速衰减。</a:t>
             </a:r>
           </a:p>
         </p:txBody>
@@ -7769,7 +7769,7 @@
                 <a:latin typeface="Times New Roman"/>
                 <a:ea typeface="宋体"/>
               </a:rPr>
-              <a:t>  2. 平滑常数 \alpha 的科学选取准则（例3-4）</a:t>
+              <a:t>2. 平滑常数 α 的科学选取准则（例3-4）</a:t>
             </a:r>
           </a:p>
         </p:txBody>
@@ -7812,7 +7812,7 @@
                 <a:latin typeface="Times New Roman"/>
                 <a:ea typeface="宋体"/>
               </a:rPr>
-              <a:t>（1）平滑常数取值区间： </a:t>
+              <a:t>（1）平滑常数取值区间：</a:t>
             </a:r>
             <a:r>
               <a:rPr sz="1250" b="0">
@@ -7822,7 +7822,7 @@
                 <a:latin typeface="Times New Roman"/>
                 <a:ea typeface="宋体"/>
               </a:rPr>
-              <a:t>0 &lt; \alpha &lt; 1。</a:t>
+              <a:t>0 &lt; α &lt; 1。</a:t>
             </a:r>
           </a:p>
           <a:p>
@@ -7842,7 +7842,7 @@
                 <a:latin typeface="Times New Roman"/>
                 <a:ea typeface="宋体"/>
               </a:rPr>
-              <a:t>（2）平稳市场选择小 \alpha (0.1 ~ 0.3)： </a:t>
+              <a:t>（2）平稳市场选择小 α (0.1 ~ 0.3)：</a:t>
             </a:r>
             <a:r>
               <a:rPr sz="1250" b="0">
@@ -7872,7 +7872,7 @@
                 <a:latin typeface="Times New Roman"/>
                 <a:ea typeface="宋体"/>
               </a:rPr>
-              <a:t>（3）剧烈波动市场选择大 \alpha (0.6 ~ 0.9)： </a:t>
+              <a:t>（3）剧烈波动市场选择大 α (0.6 ~ 0.9)：</a:t>
             </a:r>
             <a:r>
               <a:rPr sz="1250" b="0">
@@ -7939,7 +7939,7 @@
                 <a:latin typeface="Times New Roman"/>
                 <a:ea typeface="宋体"/>
               </a:rPr>
-              <a:t>  ★ 核心要点：指数平滑法以极小的存储开销实现了对全历史数据的记忆与自适应修正。</a:t>
+              <a:t>★ 核心要点：指数平滑法以极小的存储开销实现了对全历史数据的记忆与自适应修正。</a:t>
             </a:r>
           </a:p>
         </p:txBody>
@@ -8346,7 +8346,7 @@
                 <a:latin typeface="Times New Roman"/>
                 <a:ea typeface="宋体"/>
               </a:rPr>
-              <a:t>  1. 经典乘法分解模型公式</a:t>
+              <a:t>1. 经典乘法分解模型公式</a:t>
             </a:r>
           </a:p>
         </p:txBody>
@@ -8389,7 +8389,7 @@
                 <a:latin typeface="Times New Roman"/>
                 <a:ea typeface="宋体"/>
               </a:rPr>
-              <a:t>（1）综合时间序列模型： </a:t>
+              <a:t>（1）综合时间序列模型：</a:t>
             </a:r>
             <a:r>
               <a:rPr sz="1250" b="0">
@@ -8399,7 +8399,7 @@
                 <a:latin typeface="Times New Roman"/>
                 <a:ea typeface="宋体"/>
               </a:rPr>
-              <a:t>Y_t = T_t \times S_t \times C_t \times I_t</a:t>
+              <a:t>Yₜ = Tₜ × Sₜ × Cₜ × Iₜ</a:t>
             </a:r>
           </a:p>
           <a:p>
@@ -8419,7 +8419,7 @@
                 <a:latin typeface="Times New Roman"/>
                 <a:ea typeface="宋体"/>
               </a:rPr>
-              <a:t>（2）长期趋势因子 (T, Secular Trend)： </a:t>
+              <a:t>（2）长期趋势因子 (T, Secular Trend)：</a:t>
             </a:r>
             <a:r>
               <a:rPr sz="1250" b="0">
@@ -8449,7 +8449,7 @@
                 <a:latin typeface="Times New Roman"/>
                 <a:ea typeface="宋体"/>
               </a:rPr>
-              <a:t>（3）季节变动因子 (S, Seasonal Variation)： </a:t>
+              <a:t>（3）季节变动因子 (S, Seasonal Variation)：</a:t>
             </a:r>
             <a:r>
               <a:rPr sz="1250" b="0">
@@ -8559,7 +8559,7 @@
                 <a:latin typeface="Times New Roman"/>
                 <a:ea typeface="宋体"/>
               </a:rPr>
-              <a:t>  2. 循环与不规则变动因子</a:t>
+              <a:t>2. 循环与不规则变动因子</a:t>
             </a:r>
           </a:p>
         </p:txBody>
@@ -8602,7 +8602,7 @@
                 <a:latin typeface="Times New Roman"/>
                 <a:ea typeface="宋体"/>
               </a:rPr>
-              <a:t>（4）循环变动因子 (C, Cyclical Variation)： </a:t>
+              <a:t>（4）循环变动因子 (C, Cyclical Variation)：</a:t>
             </a:r>
             <a:r>
               <a:rPr sz="1250" b="0">
@@ -8632,7 +8632,7 @@
                 <a:latin typeface="Times New Roman"/>
                 <a:ea typeface="宋体"/>
               </a:rPr>
-              <a:t>（5）不规则随机变动 (I, Irregular/Random Variation)： </a:t>
+              <a:t>（5）不规则随机变动 (I, Irregular/Random Variation)：</a:t>
             </a:r>
             <a:r>
               <a:rPr sz="1250" b="0">
@@ -8699,7 +8699,7 @@
                 <a:latin typeface="Times New Roman"/>
                 <a:ea typeface="宋体"/>
               </a:rPr>
-              <a:t>  ★ 核心要点：乘法分解模型将交织在一起的复合时间序列拆解为四个独立运作的物理因子，奠定了精准预测的基石。</a:t>
+              <a:t>★ 核心要点：乘法分解模型将交织在一起的复合时间序列拆解为四个独立运作的物理因子，奠定了精准预测的基石。</a:t>
             </a:r>
           </a:p>
         </p:txBody>
@@ -9106,7 +9106,7 @@
                 <a:latin typeface="Times New Roman"/>
                 <a:ea typeface="宋体"/>
               </a:rPr>
-              <a:t>  1. 移动平均趋势剔除与季节比率法步骤</a:t>
+              <a:t>1. 移动平均趋势剔除与季节比率法步骤</a:t>
             </a:r>
           </a:p>
         </p:txBody>
@@ -9149,7 +9149,7 @@
                 <a:latin typeface="Times New Roman"/>
                 <a:ea typeface="宋体"/>
               </a:rPr>
-              <a:t>（1）计算 4 季度中心化移动平均值 (CMA)： </a:t>
+              <a:t>（1）计算 4 季度中心化移动平均值 (CMA)：</a:t>
             </a:r>
             <a:r>
               <a:rPr sz="1250" b="0">
@@ -9179,7 +9179,7 @@
                 <a:latin typeface="Times New Roman"/>
                 <a:ea typeface="宋体"/>
               </a:rPr>
-              <a:t>（2）计算原始值与趋势比率： </a:t>
+              <a:t>（2）计算原始值与趋势比率：</a:t>
             </a:r>
             <a:r>
               <a:rPr sz="1250" b="0">
@@ -9189,7 +9189,7 @@
                 <a:latin typeface="Times New Roman"/>
                 <a:ea typeface="宋体"/>
               </a:rPr>
-              <a:t>Ratio = Y / CMA \approx S \times I。</a:t>
+              <a:t>Ratio = Y / CMA ≈ S × I。</a:t>
             </a:r>
           </a:p>
           <a:p>
@@ -9209,7 +9209,7 @@
                 <a:latin typeface="Times New Roman"/>
                 <a:ea typeface="宋体"/>
               </a:rPr>
-              <a:t>（3）同季平均与标准化调整： </a:t>
+              <a:t>（3）同季平均与标准化调整：</a:t>
             </a:r>
             <a:r>
               <a:rPr sz="1250" b="0">
@@ -9219,7 +9219,7 @@
                 <a:latin typeface="Times New Roman"/>
                 <a:ea typeface="宋体"/>
               </a:rPr>
-              <a:t>将各年份相同季度的比率求算术平均，并乘以修正系数使四季指数之和严格等于 400% (即 \sum S_i = 4.0)。</a:t>
+              <a:t>将各年份相同季度的比率求算术平均，并乘以修正系数使四季指数之和严格等于 400% (即 ∑ Sᵢ = 4.0)。</a:t>
             </a:r>
           </a:p>
         </p:txBody>
@@ -9319,7 +9319,7 @@
                 <a:latin typeface="Times New Roman"/>
                 <a:ea typeface="宋体"/>
               </a:rPr>
-              <a:t>  2. 季节指数实务应用（冷饮企业算例）</a:t>
+              <a:t>2. 季节指数实务应用（冷饮企业算例）</a:t>
             </a:r>
           </a:p>
         </p:txBody>
@@ -9362,7 +9362,7 @@
                 <a:latin typeface="Times New Roman"/>
                 <a:ea typeface="宋体"/>
               </a:rPr>
-              <a:t>（1）测算得出季节指数： </a:t>
+              <a:t>（1）测算得出季节指数：</a:t>
             </a:r>
             <a:r>
               <a:rPr sz="1250" b="0">
@@ -9372,7 +9372,7 @@
                 <a:latin typeface="Times New Roman"/>
                 <a:ea typeface="宋体"/>
               </a:rPr>
-              <a:t>S_1(春)=0.60, S_2(夏)=1.80, S_3(秋)=1.10, S_4(冬)=0.50。</a:t>
+              <a:t>S₁(春)=0.60, S₂(夏)=1.80, S₃(秋)=1.10, S₄(冬)=0.50。</a:t>
             </a:r>
           </a:p>
           <a:p>
@@ -9392,7 +9392,7 @@
                 <a:latin typeface="Times New Roman"/>
                 <a:ea typeface="宋体"/>
               </a:rPr>
-              <a:t>（2）去季节化调整（Deseasonalization）： </a:t>
+              <a:t>（2）去季节化调整（Deseasonalization）：</a:t>
             </a:r>
             <a:r>
               <a:rPr sz="1250" b="0">
@@ -9402,7 +9402,7 @@
                 <a:latin typeface="Times New Roman"/>
                 <a:ea typeface="宋体"/>
               </a:rPr>
-              <a:t>去季化销量 = Y_t / S_t，用于精准评估企业的底层内生真实增长动量。</a:t>
+              <a:t>去季化销量 = Yₜ / Sₜ，用于精准评估企业的底层内生真实增长动量。</a:t>
             </a:r>
           </a:p>
           <a:p>
@@ -9422,7 +9422,7 @@
                 <a:latin typeface="Times New Roman"/>
                 <a:ea typeface="宋体"/>
               </a:rPr>
-              <a:t>（3）未来季节预测展开： </a:t>
+              <a:t>（3）未来季节预测展开：</a:t>
             </a:r>
             <a:r>
               <a:rPr sz="1250" b="0">
@@ -9432,7 +9432,7 @@
                 <a:latin typeface="Times New Roman"/>
                 <a:ea typeface="宋体"/>
               </a:rPr>
-              <a:t>若由长期趋势预测明年平均季度销量为 1000 万箱 \implies 夏季预测销量 = 1000 \times 1.80 = 1800 万箱！</a:t>
+              <a:t>若由长期趋势预测明年平均季度销量为 1000 万箱 ⇒ 夏季预测销量 = 1000 × 1.80 = 1800 万箱！</a:t>
             </a:r>
           </a:p>
         </p:txBody>
@@ -9489,7 +9489,7 @@
                 <a:latin typeface="Times New Roman"/>
                 <a:ea typeface="宋体"/>
               </a:rPr>
-              <a:t>  ★ 核心要点：季节指数精准量化了淡旺季峰谷落差，为供应链提前备料与柔性排产提供了核心依据。</a:t>
+              <a:t>★ 核心要点：季节指数精准量化了淡旺季峰谷落差，为供应链提前备料与柔性排产提供了核心依据。</a:t>
             </a:r>
           </a:p>
         </p:txBody>
@@ -9896,7 +9896,7 @@
                 <a:latin typeface="Times New Roman"/>
                 <a:ea typeface="宋体"/>
               </a:rPr>
-              <a:t>  1. 企业综合预测六步闭环流程</a:t>
+              <a:t>1. 企业综合预测六步闭环流程</a:t>
             </a:r>
           </a:p>
         </p:txBody>
@@ -9939,7 +9939,7 @@
                 <a:latin typeface="Times New Roman"/>
                 <a:ea typeface="宋体"/>
               </a:rPr>
-              <a:t>（1）明确预测目标与时间跨度： </a:t>
+              <a:t>（1）明确预测目标与时间跨度：</a:t>
             </a:r>
             <a:r>
               <a:rPr sz="1250" b="0">
@@ -9969,7 +9969,7 @@
                 <a:latin typeface="Times New Roman"/>
                 <a:ea typeface="宋体"/>
               </a:rPr>
-              <a:t>（2）数据收集与清洗： </a:t>
+              <a:t>（2）数据收集与清洗：</a:t>
             </a:r>
             <a:r>
               <a:rPr sz="1250" b="0">
@@ -9999,7 +9999,7 @@
                 <a:latin typeface="Times New Roman"/>
                 <a:ea typeface="宋体"/>
               </a:rPr>
-              <a:t>（3）模型选择与交叉拟合： </a:t>
+              <a:t>（3）模型选择与交叉拟合：</a:t>
             </a:r>
             <a:r>
               <a:rPr sz="1250" b="0">
@@ -10029,7 +10029,7 @@
                 <a:latin typeface="Times New Roman"/>
                 <a:ea typeface="宋体"/>
               </a:rPr>
-              <a:t>（4）定性专家意见校准： </a:t>
+              <a:t>（4）定性专家意见校准：</a:t>
             </a:r>
             <a:r>
               <a:rPr sz="1250" b="0">
@@ -10139,7 +10139,7 @@
                 <a:latin typeface="Times New Roman"/>
                 <a:ea typeface="宋体"/>
               </a:rPr>
-              <a:t>  2. 预测精度评估与误差指标监控</a:t>
+              <a:t>2. 预测精度评估与误差指标监控</a:t>
             </a:r>
           </a:p>
         </p:txBody>
@@ -10182,7 +10182,7 @@
                 <a:latin typeface="Times New Roman"/>
                 <a:ea typeface="宋体"/>
               </a:rPr>
-              <a:t>（1）平均绝对误差（MAD）： </a:t>
+              <a:t>（1）平均绝对误差（MAD）：</a:t>
             </a:r>
             <a:r>
               <a:rPr sz="1250" b="0">
@@ -10192,7 +10192,7 @@
                 <a:latin typeface="Times New Roman"/>
                 <a:ea typeface="宋体"/>
               </a:rPr>
-              <a:t>MAD = \frac{1}{n} \sum |A_t - F_t|（直观反映平均预测绝对偏差）。</a:t>
+              <a:t>MAD = 1 / n ∑ |Aₜ - Fₜ|（直观反映平均预测绝对偏差）。</a:t>
             </a:r>
           </a:p>
           <a:p>
@@ -10212,7 +10212,7 @@
                 <a:latin typeface="Times New Roman"/>
                 <a:ea typeface="宋体"/>
               </a:rPr>
-              <a:t>（2）平均绝对百分比误差（MAPE）： </a:t>
+              <a:t>（2）平均绝对百分比误差（MAPE）：</a:t>
             </a:r>
             <a:r>
               <a:rPr sz="1250" b="0">
@@ -10222,7 +10222,7 @@
                 <a:latin typeface="Times New Roman"/>
                 <a:ea typeface="宋体"/>
               </a:rPr>
-              <a:t>MAPE = \frac{1}{n} \sum \left| \frac{A_t - F_t}{A_t} \right| \times 100\%（跨品类横向评估精度的通用黄金指标，MAPE &lt; 10% 优秀）。</a:t>
+              <a:t>MAPE = 1 / n ∑ left| (Aₜ - Fₜ) / (Aₜ) right| × 100%（跨品类横向评估精度的通用黄金指标，MAPE &lt; 10% 优秀）。</a:t>
             </a:r>
           </a:p>
         </p:txBody>
@@ -10279,7 +10279,7 @@
                 <a:latin typeface="Times New Roman"/>
                 <a:ea typeface="宋体"/>
               </a:rPr>
-              <a:t>  ★ 核心要点：建立定量模型与定性专家校准相结合的预测闭环体系，是现代企业降本增效的核心竞争力。</a:t>
+              <a:t>★ 核心要点：建立定量模型与定性专家校准相结合的预测闭环体系，是现代企业降本增效的核心竞争力。</a:t>
             </a:r>
           </a:p>
         </p:txBody>
@@ -10686,7 +10686,7 @@
                 <a:latin typeface="Times New Roman"/>
                 <a:ea typeface="宋体"/>
               </a:rPr>
-              <a:t>  1. 滚动预测机制（Rolling Horizon）</a:t>
+              <a:t>1. 滚动预测机制（Rolling Horizon）</a:t>
             </a:r>
           </a:p>
         </p:txBody>
@@ -10729,7 +10729,7 @@
                 <a:latin typeface="Times New Roman"/>
                 <a:ea typeface="宋体"/>
               </a:rPr>
-              <a:t>（1）传统年度静态预算缺陷： </a:t>
+              <a:t>（1）传统年度静态预算缺陷：</a:t>
             </a:r>
             <a:r>
               <a:rPr sz="1250" b="0">
@@ -10759,7 +10759,7 @@
                 <a:latin typeface="Times New Roman"/>
                 <a:ea typeface="宋体"/>
               </a:rPr>
-              <a:t>（2）12~18 个月动态滚动刷新： </a:t>
+              <a:t>（2）12~18 个月动态滚动刷新：</a:t>
             </a:r>
             <a:r>
               <a:rPr sz="1250" b="0">
@@ -10789,7 +10789,7 @@
                 <a:latin typeface="Times New Roman"/>
                 <a:ea typeface="宋体"/>
               </a:rPr>
-              <a:t>（3）敏捷应对牛鞭效应： </a:t>
+              <a:t>（3）敏捷应对牛鞭效应：</a:t>
             </a:r>
             <a:r>
               <a:rPr sz="1250" b="0">
@@ -10899,7 +10899,7 @@
                 <a:latin typeface="Times New Roman"/>
                 <a:ea typeface="宋体"/>
               </a:rPr>
-              <a:t>  2. 销售与运营规划（S&amp;OP）跨部门协同</a:t>
+              <a:t>2. 销售与运营规划（S&amp;OP）跨部门协同</a:t>
             </a:r>
           </a:p>
         </p:txBody>
@@ -10942,7 +10942,7 @@
                 <a:latin typeface="Times New Roman"/>
                 <a:ea typeface="宋体"/>
               </a:rPr>
-              <a:t>（1）S&amp;OP 核心目标： </a:t>
+              <a:t>（1）S&amp;OP 核心目标：</a:t>
             </a:r>
             <a:r>
               <a:rPr sz="1250" b="0">
@@ -10972,7 +10972,7 @@
                 <a:latin typeface="Times New Roman"/>
                 <a:ea typeface="宋体"/>
               </a:rPr>
-              <a:t>（2）决策闭环： </a:t>
+              <a:t>（2）决策闭环：</a:t>
             </a:r>
             <a:r>
               <a:rPr sz="1250" b="0">
@@ -11039,7 +11039,7 @@
                 <a:latin typeface="Times New Roman"/>
                 <a:ea typeface="宋体"/>
               </a:rPr>
-              <a:t>  ★ 核心要点：滚动预测与 S&amp;OP 流程将孤立的预测数学模型升华为全企业端到端的敏捷运营管理体系。</a:t>
+              <a:t>★ 核心要点：滚动预测与 S&amp;OP 流程将孤立的预测数学模型升华为全企业端到端的敏捷运营管理体系。</a:t>
             </a:r>
           </a:p>
         </p:txBody>
@@ -14268,7 +14268,7 @@
                 <a:latin typeface="Times New Roman"/>
                 <a:ea typeface="宋体"/>
               </a:rPr>
-              <a:t>  需求估计实证方法</a:t>
+              <a:t>需求估计实证方法</a:t>
             </a:r>
           </a:p>
         </p:txBody>
@@ -14472,7 +14472,7 @@
                 <a:latin typeface="Times New Roman"/>
                 <a:ea typeface="宋体"/>
               </a:rPr>
-              <a:t>  统计检验与陷阱防范</a:t>
+              <a:t>统计检验与陷阱防范</a:t>
             </a:r>
           </a:p>
         </p:txBody>
@@ -14676,7 +14676,7 @@
                 <a:latin typeface="Times New Roman"/>
                 <a:ea typeface="宋体"/>
               </a:rPr>
-              <a:t>  定性预测与德尔菲法</a:t>
+              <a:t>定性预测与德尔菲法</a:t>
             </a:r>
           </a:p>
         </p:txBody>
@@ -14880,7 +14880,7 @@
                 <a:latin typeface="Times New Roman"/>
                 <a:ea typeface="宋体"/>
               </a:rPr>
-              <a:t>  时间序列与季节分解</a:t>
+              <a:t>时间序列与季节分解</a:t>
             </a:r>
           </a:p>
         </p:txBody>
@@ -15041,7 +15041,7 @@
                 <a:latin typeface="Times New Roman"/>
                 <a:ea typeface="宋体"/>
               </a:rPr>
-              <a:t>  ★ 战略结语：需求估计与预测是连接管理经济学理论与企业商业实战的桥梁，数据驱动的量化预测是科学决策的坚实基石。</a:t>
+              <a:t>★ 战略结语：需求估计与预测是连接管理经济学理论与企业商业实战的桥梁，数据驱动的量化预测是科学决策的坚实基石。</a:t>
             </a:r>
           </a:p>
         </p:txBody>
@@ -15448,7 +15448,7 @@
                 <a:latin typeface="Times New Roman"/>
                 <a:ea typeface="宋体"/>
               </a:rPr>
-              <a:t>  课后复习思考题与 MBA 讨论案例（严格对应课本习题）</a:t>
+              <a:t>课后复习思考题与 MBA 讨论案例（严格对应课本习题）</a:t>
             </a:r>
           </a:p>
         </p:txBody>
@@ -15491,7 +15491,7 @@
                 <a:latin typeface="Times New Roman"/>
                 <a:ea typeface="宋体"/>
               </a:rPr>
-              <a:t>1. </a:t>
+              <a:t>1.</a:t>
             </a:r>
             <a:r>
               <a:rPr sz="1150" b="0">
@@ -15521,7 +15521,7 @@
                 <a:latin typeface="Times New Roman"/>
                 <a:ea typeface="宋体"/>
               </a:rPr>
-              <a:t>2. </a:t>
+              <a:t>2.</a:t>
             </a:r>
             <a:r>
               <a:rPr sz="1150" b="0">
@@ -15551,7 +15551,7 @@
                 <a:latin typeface="Times New Roman"/>
                 <a:ea typeface="宋体"/>
               </a:rPr>
-              <a:t>3. </a:t>
+              <a:t>3.</a:t>
             </a:r>
             <a:r>
               <a:rPr sz="1150" b="0">
@@ -15581,7 +15581,7 @@
                 <a:latin typeface="Times New Roman"/>
                 <a:ea typeface="宋体"/>
               </a:rPr>
-              <a:t>4. </a:t>
+              <a:t>4.</a:t>
             </a:r>
             <a:r>
               <a:rPr sz="1150" b="0">
@@ -15611,7 +15611,7 @@
                 <a:latin typeface="Times New Roman"/>
                 <a:ea typeface="宋体"/>
               </a:rPr>
-              <a:t>5. </a:t>
+              <a:t>5.</a:t>
             </a:r>
             <a:r>
               <a:rPr sz="1150" b="0">
@@ -15641,7 +15641,7 @@
                 <a:latin typeface="Times New Roman"/>
                 <a:ea typeface="宋体"/>
               </a:rPr>
-              <a:t>6. </a:t>
+              <a:t>6.</a:t>
             </a:r>
             <a:r>
               <a:rPr sz="1150" b="0">
@@ -15651,7 +15651,7 @@
                 <a:latin typeface="Times New Roman"/>
                 <a:ea typeface="宋体"/>
               </a:rPr>
-              <a:t>【作业题1】某企业收集了过去 6 年的广告费用 X（万元）与产品销售量 Y（万件）数据。经计算得到：\sum X=30, \sum Y=60, \sum X^2=190, \sum XY=350。试用 OLS 求样本回归方程，并预测广告费为 10 万元时的销售量。</a:t>
+              <a:t>【作业题1】某企业收集了过去 6 年的广告费用 X（万元）与产品销售量 Y（万件）数据。经计算得到：∑ X=30, ∑ Y=60, ∑ X²=190, ∑ XY=350。试用 OLS 求样本回归方程，并预测广告费为 10 万元时的销售量。</a:t>
             </a:r>
           </a:p>
           <a:p>
@@ -15671,7 +15671,7 @@
                 <a:latin typeface="Times New Roman"/>
                 <a:ea typeface="宋体"/>
               </a:rPr>
-              <a:t>7. </a:t>
+              <a:t>7.</a:t>
             </a:r>
             <a:r>
               <a:rPr sz="1150" b="0">
@@ -15681,7 +15681,7 @@
                 <a:latin typeface="Times New Roman"/>
                 <a:ea typeface="宋体"/>
               </a:rPr>
-              <a:t>【作业题2】某空调厂商过去 4 年各季度的销售量数据显示，第一季度至第四季度的季节指数分别为 S_1=0.7, S_2=1.8, S_3=1.1, S_4=0.4。若预测明年平均季度基准销量为 50 万台，求明年各季度的预测销售量。</a:t>
+              <a:t>【作业题2】某空调厂商过去 4 年各季度的销售量数据显示，第一季度至第四季度的季节指数分别为 S₁=0.7, S₂=1.8, S₃=1.1, S₄=0.4。若预测明年平均季度基准销量为 50 万台，求明年各季度的预测销售量。</a:t>
             </a:r>
           </a:p>
         </p:txBody>
@@ -16395,7 +16395,7 @@
                 <a:latin typeface="Times New Roman"/>
                 <a:ea typeface="宋体"/>
               </a:rPr>
-              <a:t>  1. 市场调查法（Market Survey）</a:t>
+              <a:t>1. 市场调查法（Market Survey）</a:t>
             </a:r>
           </a:p>
         </p:txBody>
@@ -16438,7 +16438,7 @@
                 <a:latin typeface="Times New Roman"/>
                 <a:ea typeface="宋体"/>
               </a:rPr>
-              <a:t>（1）问卷访问法： </a:t>
+              <a:t>（1）问卷访问法：</a:t>
             </a:r>
             <a:r>
               <a:rPr sz="1250" b="0">
@@ -16468,7 +16468,7 @@
                 <a:latin typeface="Times New Roman"/>
                 <a:ea typeface="宋体"/>
               </a:rPr>
-              <a:t>（2）应答者偏误（Response Bias）： </a:t>
+              <a:t>（2）应答者偏误（Response Bias）：</a:t>
             </a:r>
             <a:r>
               <a:rPr sz="1250" b="0">
@@ -16498,7 +16498,7 @@
                 <a:latin typeface="Times New Roman"/>
                 <a:ea typeface="宋体"/>
               </a:rPr>
-              <a:t>（3）掩饰性提问法（Disguised Questioning）： </a:t>
+              <a:t>（3）掩饰性提问法（Disguised Questioning）：</a:t>
             </a:r>
             <a:r>
               <a:rPr sz="1250" b="0">
@@ -16608,7 +16608,7 @@
                 <a:latin typeface="Times New Roman"/>
                 <a:ea typeface="宋体"/>
               </a:rPr>
-              <a:t>  2. 市场实验法（Market Experiment）</a:t>
+              <a:t>2. 市场实验法（Market Experiment）</a:t>
             </a:r>
           </a:p>
         </p:txBody>
@@ -16651,7 +16651,7 @@
                 <a:latin typeface="Times New Roman"/>
                 <a:ea typeface="宋体"/>
               </a:rPr>
-              <a:t>（1）实地商场测试（Field Experiment）： </a:t>
+              <a:t>（1）实地商场测试（Field Experiment）：</a:t>
             </a:r>
             <a:r>
               <a:rPr sz="1250" b="0">
@@ -16681,7 +16681,7 @@
                 <a:latin typeface="Times New Roman"/>
                 <a:ea typeface="宋体"/>
               </a:rPr>
-              <a:t>（2）互联网 A/B 测试： </a:t>
+              <a:t>（2）互联网 A/B 测试：</a:t>
             </a:r>
             <a:r>
               <a:rPr sz="1250" b="0">
@@ -16711,7 +16711,7 @@
                 <a:latin typeface="Times New Roman"/>
                 <a:ea typeface="宋体"/>
               </a:rPr>
-              <a:t>（3）局限性： </a:t>
+              <a:t>（3）局限性：</a:t>
             </a:r>
             <a:r>
               <a:rPr sz="1250" b="0">
@@ -16778,7 +16778,7 @@
                 <a:latin typeface="Times New Roman"/>
                 <a:ea typeface="宋体"/>
               </a:rPr>
-              <a:t>  ★ 核心要点：市场实验法通过真实真金白银交易数据，克服了问卷调查'口是心非'的虚假应答偏误。</a:t>
+              <a:t>★ 核心要点：市场实验法通过真实真金白银交易数据，克服了问卷调查'口是心非'的虚假应答偏误。</a:t>
             </a:r>
           </a:p>
         </p:txBody>
@@ -17185,7 +17185,7 @@
                 <a:latin typeface="Times New Roman"/>
                 <a:ea typeface="宋体"/>
               </a:rPr>
-              <a:t>  1. 焦点小组访谈法（Focus Groups）</a:t>
+              <a:t>1. 焦点小组访谈法（Focus Groups）</a:t>
             </a:r>
           </a:p>
         </p:txBody>
@@ -17228,7 +17228,7 @@
                 <a:latin typeface="Times New Roman"/>
                 <a:ea typeface="宋体"/>
               </a:rPr>
-              <a:t>（1）实施形式： </a:t>
+              <a:t>（1）实施形式：</a:t>
             </a:r>
             <a:r>
               <a:rPr sz="1250" b="0">
@@ -17258,7 +17258,7 @@
                 <a:latin typeface="Times New Roman"/>
                 <a:ea typeface="宋体"/>
               </a:rPr>
-              <a:t>（2）核心优势： </a:t>
+              <a:t>（2）核心优势：</a:t>
             </a:r>
             <a:r>
               <a:rPr sz="1250" b="0">
@@ -17288,7 +17288,7 @@
                 <a:latin typeface="Times New Roman"/>
                 <a:ea typeface="宋体"/>
               </a:rPr>
-              <a:t>（3）注意事项： </a:t>
+              <a:t>（3）注意事项：</a:t>
             </a:r>
             <a:r>
               <a:rPr sz="1250" b="0">
@@ -17398,7 +17398,7 @@
                 <a:latin typeface="Times New Roman"/>
                 <a:ea typeface="宋体"/>
               </a:rPr>
-              <a:t>  2. 联合分析法（Conjoint Analysis）高级量化估计</a:t>
+              <a:t>2. 联合分析法（Conjoint Analysis）高级量化估计</a:t>
             </a:r>
           </a:p>
         </p:txBody>
@@ -17441,7 +17441,7 @@
                 <a:latin typeface="Times New Roman"/>
                 <a:ea typeface="宋体"/>
               </a:rPr>
-              <a:t>（1）多属性权衡测试： </a:t>
+              <a:t>（1）多属性权衡测试：</a:t>
             </a:r>
             <a:r>
               <a:rPr sz="1250" b="0">
@@ -17471,7 +17471,7 @@
                 <a:latin typeface="Times New Roman"/>
                 <a:ea typeface="宋体"/>
               </a:rPr>
-              <a:t>（2）效用打分回归： </a:t>
+              <a:t>（2）效用打分回归：</a:t>
             </a:r>
             <a:r>
               <a:rPr sz="1250" b="0">
@@ -17538,7 +17538,7 @@
                 <a:latin typeface="Times New Roman"/>
                 <a:ea typeface="宋体"/>
               </a:rPr>
-              <a:t>  ★ 核心要点：联合分析法是现代消费电子与汽车行业在新产品立项阶段精确评估消费者功能偏好的行业标准。</a:t>
+              <a:t>★ 核心要点：联合分析法是现代消费电子与汽车行业在新产品立项阶段精确评估消费者功能偏好的行业标准。</a:t>
             </a:r>
           </a:p>
         </p:txBody>
@@ -17945,7 +17945,7 @@
                 <a:latin typeface="Times New Roman"/>
                 <a:ea typeface="宋体"/>
               </a:rPr>
-              <a:t>  1. 样本回归方程与残差定义</a:t>
+              <a:t>1. 样本回归方程与残差定义</a:t>
             </a:r>
           </a:p>
         </p:txBody>
@@ -17988,7 +17988,7 @@
                 <a:latin typeface="Times New Roman"/>
                 <a:ea typeface="宋体"/>
               </a:rPr>
-              <a:t>（1）总体真实回归模型： </a:t>
+              <a:t>（1）总体真实回归模型：</a:t>
             </a:r>
             <a:r>
               <a:rPr sz="1250" b="0">
@@ -17998,7 +17998,7 @@
                 <a:latin typeface="Times New Roman"/>
                 <a:ea typeface="宋体"/>
               </a:rPr>
-              <a:t>Y_i = \alpha + \beta X_i + e_i \quad (e_i 为随机误差项)</a:t>
+              <a:t>Yᵢ = α + β Xᵢ + eᵢ (eᵢ 为随机误差项)</a:t>
             </a:r>
           </a:p>
           <a:p>
@@ -18018,7 +18018,7 @@
                 <a:latin typeface="Times New Roman"/>
                 <a:ea typeface="宋体"/>
               </a:rPr>
-              <a:t>（2）样本估计方程： </a:t>
+              <a:t>（2）样本估计方程：</a:t>
             </a:r>
             <a:r>
               <a:rPr sz="1250" b="0">
@@ -18028,7 +18028,7 @@
                 <a:latin typeface="Times New Roman"/>
                 <a:ea typeface="宋体"/>
               </a:rPr>
-              <a:t>\hat{Y}_i = a + b X_i</a:t>
+              <a:t>Ŷᵢ = a + b Xᵢ</a:t>
             </a:r>
           </a:p>
           <a:p>
@@ -18048,7 +18048,7 @@
                 <a:latin typeface="Times New Roman"/>
                 <a:ea typeface="宋体"/>
               </a:rPr>
-              <a:t>（3）残差（Residual）： </a:t>
+              <a:t>（3）残差（Residual）：</a:t>
             </a:r>
             <a:r>
               <a:rPr sz="1250" b="0">
@@ -18058,7 +18058,7 @@
                 <a:latin typeface="Times New Roman"/>
                 <a:ea typeface="宋体"/>
               </a:rPr>
-              <a:t>e_i = Y_i - \hat{Y}_i = Y_i - (a + b X_i) \quad (实际观测值与拟合估计值的垂直偏差)</a:t>
+              <a:t>eᵢ = Yᵢ - Ŷᵢ = Yᵢ - (a + b Xᵢ) (实际观测值与拟合估计值的垂直偏差)</a:t>
             </a:r>
           </a:p>
         </p:txBody>
@@ -18158,7 +18158,7 @@
                 <a:latin typeface="Times New Roman"/>
                 <a:ea typeface="宋体"/>
               </a:rPr>
-              <a:t>  2. OLS 目标函数与一阶偏导数学推导</a:t>
+              <a:t>2. OLS 目标函数与一阶偏导数学推导</a:t>
             </a:r>
           </a:p>
         </p:txBody>
@@ -18201,7 +18201,7 @@
                 <a:latin typeface="Times New Roman"/>
                 <a:ea typeface="宋体"/>
               </a:rPr>
-              <a:t>（1）极小化残差平方和（SSE）： </a:t>
+              <a:t>（1）极小化残差平方和（SSE）：</a:t>
             </a:r>
             <a:r>
               <a:rPr sz="1150" b="0">
@@ -18211,7 +18211,7 @@
                 <a:latin typeface="Times New Roman"/>
                 <a:ea typeface="宋体"/>
               </a:rPr>
-              <a:t>\min_{a, b} S(a, b) = \sum_{i=1}^n e_i^2 = \sum_{i=1}^n [Y_i - (a + b X_i)]^2</a:t>
+              <a:t>min S(a, b) = ∑ⁿ eᵢ² = ∑ⁿ [Yᵢ - (a + b Xᵢ)]²</a:t>
             </a:r>
           </a:p>
           <a:p>
@@ -18231,7 +18231,7 @@
                 <a:latin typeface="Times New Roman"/>
                 <a:ea typeface="宋体"/>
               </a:rPr>
-              <a:t>（2）分别对参数 a 与 b 求偏导并令其为 0： </a:t>
+              <a:t>（2）分别对参数 a 与 b 求偏导并令其为 0：</a:t>
             </a:r>
             <a:r>
               <a:rPr sz="1150" b="0">
@@ -18261,7 +18261,7 @@
                 <a:latin typeface="Times New Roman"/>
                 <a:ea typeface="宋体"/>
               </a:rPr>
-              <a:t>   • \partial S / \partial a = -2 \sum [Y_i - a - b X_i] = 0 \implies </a:t>
+              <a:t>• ∂ S / ∂ a = -2 ∑ [Yᵢ - a - b Xᵢ] = 0 ⇒</a:t>
             </a:r>
             <a:r>
               <a:rPr sz="1150" b="0">
@@ -18271,7 +18271,7 @@
                 <a:latin typeface="Times New Roman"/>
                 <a:ea typeface="宋体"/>
               </a:rPr>
-              <a:t>\sum Y_i = n a + b \sum X_i \implies a = \bar{Y} - b \bar{X}</a:t>
+              <a:t>∑ Yᵢ = n a + b ∑ Xᵢ ⇒ a = Ȳ - b·X̄</a:t>
             </a:r>
           </a:p>
           <a:p>
@@ -18291,7 +18291,7 @@
                 <a:latin typeface="Times New Roman"/>
                 <a:ea typeface="宋体"/>
               </a:rPr>
-              <a:t>   • \partial S / \partial b = -2 \sum X_i [Y_i - a - b X_i] = 0 \implies </a:t>
+              <a:t>• ∂ S / ∂ b = -2 ∑ Xᵢ [Yᵢ - a - b Xᵢ] = 0 ⇒</a:t>
             </a:r>
             <a:r>
               <a:rPr sz="1150" b="0">
@@ -18301,7 +18301,7 @@
                 <a:latin typeface="Times New Roman"/>
                 <a:ea typeface="宋体"/>
               </a:rPr>
-              <a:t>\sum X_i Y_i = a \sum X_i + b \sum X_i^2</a:t>
+              <a:t>∑ Xᵢ Yᵢ = a ∑ Xᵢ + b ∑ Xᵢ²</a:t>
             </a:r>
           </a:p>
           <a:p>
@@ -18321,7 +18321,7 @@
                 <a:latin typeface="Times New Roman"/>
                 <a:ea typeface="宋体"/>
               </a:rPr>
-              <a:t>（3）联立求解斜率系数 b： </a:t>
+              <a:t>（3）联立求解斜率系数 b：</a:t>
             </a:r>
             <a:r>
               <a:rPr sz="1150" b="0">
@@ -18331,7 +18331,7 @@
                 <a:latin typeface="Times New Roman"/>
                 <a:ea typeface="宋体"/>
               </a:rPr>
-              <a:t>b = \frac{\sum (X_i - \bar{X})(Y_i - \bar{Y})}{\sum (X_i - \bar{X})^2} = \frac{n\sum X_i Y_i - \sum X_i \sum Y_i}{n\sum X_i^2 - (\sum X_i)^2}</a:t>
+              <a:t>b = (∑ (Xᵢ - X̄)(Yᵢ - Ȳ)) / (∑ (Xᵢ - X̄)²) = (n∑ Xᵢ Yᵢ - ∑ Xᵢ ∑ Yᵢ) / (n∑ Xᵢ² - (∑ Xᵢ)²)</a:t>
             </a:r>
           </a:p>
         </p:txBody>
@@ -18388,7 +18388,7 @@
                 <a:latin typeface="Times New Roman"/>
                 <a:ea typeface="宋体"/>
               </a:rPr>
-              <a:t>  ★ 核心要点：最小二乘法通过数学极值导数，确保了拟合直线在所有可能直线中拥有最小的平方预测误差。</a:t>
+              <a:t>★ 核心要点：最小二乘法通过数学极值导数，确保了拟合直线在所有可能直线中拥有最小的平方预测误差。</a:t>
             </a:r>
           </a:p>
         </p:txBody>
@@ -18795,7 +18795,7 @@
                 <a:latin typeface="Times New Roman"/>
                 <a:ea typeface="宋体"/>
               </a:rPr>
-              <a:t>  1. 柯布-道格拉斯型乘数需求模型</a:t>
+              <a:t>1. 柯布-道格拉斯型乘数需求模型</a:t>
             </a:r>
           </a:p>
         </p:txBody>
@@ -18838,7 +18838,7 @@
                 <a:latin typeface="Times New Roman"/>
                 <a:ea typeface="宋体"/>
               </a:rPr>
-              <a:t>（1）非线性幂函数形式： </a:t>
+              <a:t>（1）非线性幂函数形式：</a:t>
             </a:r>
             <a:r>
               <a:rPr sz="1250" b="0">
@@ -18848,7 +18848,7 @@
                 <a:latin typeface="Times New Roman"/>
                 <a:ea typeface="宋体"/>
               </a:rPr>
-              <a:t>Q = A \cdot P^{\beta_1} \cdot I^{\beta_2} \cdot P_r^{\beta_3}</a:t>
+              <a:t>Q = A · P^β₁ · I^β₂ · Pᵣ^β₃</a:t>
             </a:r>
           </a:p>
           <a:p>
@@ -18868,7 +18868,7 @@
                 <a:latin typeface="Times New Roman"/>
                 <a:ea typeface="宋体"/>
               </a:rPr>
-              <a:t>（2）两边取自然对数线性化： </a:t>
+              <a:t>（2）两边取自然对数线性化：</a:t>
             </a:r>
             <a:r>
               <a:rPr sz="1250" b="0">
@@ -18878,7 +18878,7 @@
                 <a:latin typeface="Times New Roman"/>
                 <a:ea typeface="宋体"/>
               </a:rPr>
-              <a:t>\ln Q = \ln A + \beta_1 \ln P + \beta_2 \ln I + \beta_3 \ln P_r + e</a:t>
+              <a:t>ln Q = ln A + β₁ ln P + β₂ ln I + β₃ ln Pᵣ + e</a:t>
             </a:r>
           </a:p>
           <a:p>
@@ -18898,7 +18898,7 @@
                 <a:latin typeface="Times New Roman"/>
                 <a:ea typeface="宋体"/>
               </a:rPr>
-              <a:t>（3）双对数回归卓越优势： </a:t>
+              <a:t>（3）双对数回归卓越优势：</a:t>
             </a:r>
             <a:r>
               <a:rPr sz="1250" b="0">
@@ -19008,7 +19008,7 @@
                 <a:latin typeface="Times New Roman"/>
                 <a:ea typeface="宋体"/>
               </a:rPr>
-              <a:t>  2. 弹性系数常数化与直接读取</a:t>
+              <a:t>2. 弹性系数常数化与直接读取</a:t>
             </a:r>
           </a:p>
         </p:txBody>
@@ -19051,7 +19051,7 @@
                 <a:latin typeface="Times New Roman"/>
                 <a:ea typeface="宋体"/>
               </a:rPr>
-              <a:t>（1）价格弹性微积分推导： </a:t>
+              <a:t>（1）价格弹性微积分推导：</a:t>
             </a:r>
             <a:r>
               <a:rPr sz="1250" b="0">
@@ -19061,7 +19061,7 @@
                 <a:latin typeface="Times New Roman"/>
                 <a:ea typeface="宋体"/>
               </a:rPr>
-              <a:t>E_p = \frac{dQ}{dP} \cdot \frac{P}{Q} = \frac{d(\ln Q)}{d(\ln P)} = \beta_1 \quad (恒等于常数 \beta_1！)</a:t>
+              <a:t>Ep = dQ / dP · P / Q = (d(ln Q)) / (d(ln P)) = β₁ (恒等于常数 β₁！)</a:t>
             </a:r>
           </a:p>
           <a:p>
@@ -19081,7 +19081,7 @@
                 <a:latin typeface="Times New Roman"/>
                 <a:ea typeface="宋体"/>
               </a:rPr>
-              <a:t>（2）收入与交叉弹性： </a:t>
+              <a:t>（2）收入与交叉弹性：</a:t>
             </a:r>
             <a:r>
               <a:rPr sz="1250" b="0">
@@ -19091,7 +19091,7 @@
                 <a:latin typeface="Times New Roman"/>
                 <a:ea typeface="宋体"/>
               </a:rPr>
-              <a:t>同理，\beta_2 恒等于需求收入弹性 E_i，\beta_3 恒等于交叉价格弹性 E_{xy}。</a:t>
+              <a:t>同理，β₂ 恒等于需求收入弹性 Eᵢ，β₃ 恒等于交叉价格弹性 Exy。</a:t>
             </a:r>
           </a:p>
           <a:p>
@@ -19111,7 +19111,7 @@
                 <a:latin typeface="Times New Roman"/>
                 <a:ea typeface="宋体"/>
               </a:rPr>
-              <a:t>（3）实战商业价值： </a:t>
+              <a:t>（3）实战商业价值：</a:t>
             </a:r>
             <a:r>
               <a:rPr sz="1250" b="0">
@@ -19178,7 +19178,7 @@
                 <a:latin typeface="Times New Roman"/>
                 <a:ea typeface="宋体"/>
               </a:rPr>
-              <a:t>  ★ 核心要点：双对数常弹性模型是实证管理经济学与产业组织研究中最经典、应用最广泛的模型范式。</a:t>
+              <a:t>★ 核心要点：双对数常弹性模型是实证管理经济学与产业组织研究中最经典、应用最广泛的模型范式。</a:t>
             </a:r>
           </a:p>
         </p:txBody>
@@ -19585,7 +19585,7 @@
                 <a:latin typeface="Times New Roman"/>
                 <a:ea typeface="宋体"/>
               </a:rPr>
-              <a:t>  1. 平方和三项分解定理</a:t>
+              <a:t>1. 平方和三项分解定理</a:t>
             </a:r>
           </a:p>
         </p:txBody>
@@ -19628,7 +19628,7 @@
                 <a:latin typeface="Times New Roman"/>
                 <a:ea typeface="宋体"/>
               </a:rPr>
-              <a:t>（1）总离差平方和（SST）： </a:t>
+              <a:t>（1）总离差平方和（SST）：</a:t>
             </a:r>
             <a:r>
               <a:rPr sz="1250" b="0">
@@ -19638,7 +19638,7 @@
                 <a:latin typeface="Times New Roman"/>
                 <a:ea typeface="宋体"/>
               </a:rPr>
-              <a:t>SST = \sum (Y_i - \bar{Y})^2 \quad (实际观测值总变异程度)</a:t>
+              <a:t>SST = ∑ (Yᵢ - Ȳ)² (实际观测值总变异程度)</a:t>
             </a:r>
           </a:p>
           <a:p>
@@ -19658,7 +19658,7 @@
                 <a:latin typeface="Times New Roman"/>
                 <a:ea typeface="宋体"/>
               </a:rPr>
-              <a:t>（2）回归解释平方和（SSR）： </a:t>
+              <a:t>（2）回归解释平方和（SSR）：</a:t>
             </a:r>
             <a:r>
               <a:rPr sz="1250" b="0">
@@ -19668,7 +19668,7 @@
                 <a:latin typeface="Times New Roman"/>
                 <a:ea typeface="宋体"/>
               </a:rPr>
-              <a:t>SSR = \sum (\hat{Y}_i - \bar{Y})^2 \quad (由自变量 X 解释的变异量)</a:t>
+              <a:t>SSR = ∑ (Ŷᵢ - Ȳ)² (由自变量 X 解释的变异量)</a:t>
             </a:r>
           </a:p>
           <a:p>
@@ -19688,7 +19688,7 @@
                 <a:latin typeface="Times New Roman"/>
                 <a:ea typeface="宋体"/>
               </a:rPr>
-              <a:t>（3）残差未解释平方和（SSE）： </a:t>
+              <a:t>（3）残差未解释平方和（SSE）：</a:t>
             </a:r>
             <a:r>
               <a:rPr sz="1250" b="0">
@@ -19698,7 +19698,7 @@
                 <a:latin typeface="Times New Roman"/>
                 <a:ea typeface="宋体"/>
               </a:rPr>
-              <a:t>SSE = \sum (Y_i - \hat{Y}_i)^2 \quad (未被自变量解释的随机误差)</a:t>
+              <a:t>SSE = ∑ (Yᵢ - Ŷᵢ)² (未被自变量解释的随机误差)</a:t>
             </a:r>
           </a:p>
           <a:p>
@@ -19718,7 +19718,7 @@
                 <a:latin typeface="Times New Roman"/>
                 <a:ea typeface="宋体"/>
               </a:rPr>
-              <a:t>（4）平方和恒等式： </a:t>
+              <a:t>（4）平方和恒等式：</a:t>
             </a:r>
             <a:r>
               <a:rPr sz="1250" b="0">
@@ -19828,7 +19828,7 @@
                 <a:latin typeface="Times New Roman"/>
                 <a:ea typeface="宋体"/>
               </a:rPr>
-              <a:t>  2. 决定系数 R² 与调整后 R²</a:t>
+              <a:t>2. 决定系数 R² 与调整后 R²</a:t>
             </a:r>
           </a:p>
         </p:txBody>
@@ -19871,7 +19871,7 @@
                 <a:latin typeface="Times New Roman"/>
                 <a:ea typeface="宋体"/>
               </a:rPr>
-              <a:t>（1）决定系数定义： </a:t>
+              <a:t>（1）决定系数定义：</a:t>
             </a:r>
             <a:r>
               <a:rPr sz="1250" b="0">
@@ -19881,7 +19881,7 @@
                 <a:latin typeface="Times New Roman"/>
                 <a:ea typeface="宋体"/>
               </a:rPr>
-              <a:t>R^2 = \frac{SSR}{SST} = 1 - \frac{SSE}{SST} \quad (0 \le R^2 \le 1)</a:t>
+              <a:t>R² = SSR / SST = 1 - SSE / SST (0 ≤ R² ≤ 1)</a:t>
             </a:r>
           </a:p>
           <a:p>
@@ -19901,7 +19901,7 @@
                 <a:latin typeface="Times New Roman"/>
                 <a:ea typeface="宋体"/>
               </a:rPr>
-              <a:t>（2）经济含义： </a:t>
+              <a:t>（2）经济含义：</a:t>
             </a:r>
             <a:r>
               <a:rPr sz="1250" b="0">
@@ -19911,7 +19911,7 @@
                 <a:latin typeface="Times New Roman"/>
                 <a:ea typeface="宋体"/>
               </a:rPr>
-              <a:t>R^2 = 0.85 意味着因变量总波动的 85% 可以由模型中的自变量精确解释。</a:t>
+              <a:t>R² = 0.85 意味着因变量总波动的 85% 可以由模型中的自变量精确解释。</a:t>
             </a:r>
           </a:p>
           <a:p>
@@ -19931,7 +19931,7 @@
                 <a:latin typeface="Times New Roman"/>
                 <a:ea typeface="宋体"/>
               </a:rPr>
-              <a:t>（3）调整后决定系数（\bar{R}^2）： </a:t>
+              <a:t>（3）调整后决定系数（R̄²）：</a:t>
             </a:r>
             <a:r>
               <a:rPr sz="1250" b="0">
@@ -19941,7 +19941,7 @@
                 <a:latin typeface="Times New Roman"/>
                 <a:ea typeface="宋体"/>
               </a:rPr>
-              <a:t>\bar{R}^2 = 1 - \frac{SSE/(n - k - 1)}{SST/(n - 1)}（扣除自由度惩罚，防止盲目增加无用变量虚增 R²）。</a:t>
+              <a:t>R̄² = 1 - (SSE/(n - k - 1)) / (SST/(n - 1))（扣除自由度惩罚，防止盲目增加无用变量虚增 R²）。</a:t>
             </a:r>
           </a:p>
         </p:txBody>
@@ -19998,7 +19998,7 @@
                 <a:latin typeface="Times New Roman"/>
                 <a:ea typeface="宋体"/>
               </a:rPr>
-              <a:t>  ★ 核心要点：决定系数 R² 量化了模型对历史样本数据的拟合紧密程度，是评价回归方程解释力的第一道门槛。</a:t>
+              <a:t>★ 核心要点：决定系数 R² 量化了模型对历史样本数据的拟合紧密程度，是评价回归方程解释力的第一道门槛。</a:t>
             </a:r>
           </a:p>
         </p:txBody>
@@ -20405,7 +20405,7 @@
                 <a:latin typeface="Times New Roman"/>
                 <a:ea typeface="宋体"/>
               </a:rPr>
-              <a:t>  1. 回归系数 t 检验（t-Test）</a:t>
+              <a:t>1. 回归系数 t 检验（t-Test）</a:t>
             </a:r>
           </a:p>
         </p:txBody>
@@ -20448,7 +20448,7 @@
                 <a:latin typeface="Times New Roman"/>
                 <a:ea typeface="宋体"/>
               </a:rPr>
-              <a:t>（1）原假设设定： </a:t>
+              <a:t>（1）原假设设定：</a:t>
             </a:r>
             <a:r>
               <a:rPr sz="1250" b="0">
@@ -20458,7 +20458,7 @@
                 <a:latin typeface="Times New Roman"/>
                 <a:ea typeface="宋体"/>
               </a:rPr>
-              <a:t>H_0: \beta_j = 0（自变量 X_j 对因变量 Y 毫无影响）。</a:t>
+              <a:t>H₀: βⱼ = 0（自变量 Xⱼ 对因变量 Y 毫无影响）。</a:t>
             </a:r>
           </a:p>
           <a:p>
@@ -20478,7 +20478,7 @@
                 <a:latin typeface="Times New Roman"/>
                 <a:ea typeface="宋体"/>
               </a:rPr>
-              <a:t>（2）t 统计量构造： </a:t>
+              <a:t>（2）t 统计量构造：</a:t>
             </a:r>
             <a:r>
               <a:rPr sz="1250" b="0">
@@ -20488,7 +20488,7 @@
                 <a:latin typeface="Times New Roman"/>
                 <a:ea typeface="宋体"/>
               </a:rPr>
-              <a:t>t = \frac{\hat{\beta}_j - 0}{SE(\hat{\beta}_j)} \quad (SE 为系数的标准估计误差)</a:t>
+              <a:t>t = (hatβⱼ - 0) / (SE(hatβⱼ)) (SE 为系数的标准估计误差)</a:t>
             </a:r>
           </a:p>
           <a:p>
@@ -20508,7 +20508,7 @@
                 <a:latin typeface="Times New Roman"/>
                 <a:ea typeface="宋体"/>
               </a:rPr>
-              <a:t>（3）判定准则（经验法则）： </a:t>
+              <a:t>（3）判定准则（经验法则）：</a:t>
             </a:r>
             <a:r>
               <a:rPr sz="1250" b="0">
@@ -20618,7 +20618,7 @@
                 <a:latin typeface="Times New Roman"/>
                 <a:ea typeface="宋体"/>
               </a:rPr>
-              <a:t>  2. 方差分析 F 检验与标准估计误差</a:t>
+              <a:t>2. 方差分析 F 检验与标准估计误差</a:t>
             </a:r>
           </a:p>
         </p:txBody>
@@ -20661,7 +20661,7 @@
                 <a:latin typeface="Times New Roman"/>
                 <a:ea typeface="宋体"/>
               </a:rPr>
-              <a:t>（1）F 统计量： </a:t>
+              <a:t>（1）F 统计量：</a:t>
             </a:r>
             <a:r>
               <a:rPr sz="1250" b="0">
@@ -20671,7 +20671,7 @@
                 <a:latin typeface="Times New Roman"/>
                 <a:ea typeface="宋体"/>
               </a:rPr>
-              <a:t>F = \frac{SSR/k}{SSE/(n - k - 1)}（检验全部自变量联合起来对因变量是否具有整体显著影响）。</a:t>
+              <a:t>F = (SSR/k) / (SSE/(n - k - 1))（检验全部自变量联合起来对因变量是否具有整体显著影响）。</a:t>
             </a:r>
           </a:p>
           <a:p>
@@ -20691,7 +20691,7 @@
                 <a:latin typeface="Times New Roman"/>
                 <a:ea typeface="宋体"/>
               </a:rPr>
-              <a:t>（2）标准估计误差（SE）： </a:t>
+              <a:t>（2）标准估计误差（SE）：</a:t>
             </a:r>
             <a:r>
               <a:rPr sz="1250" b="0">
@@ -20701,7 +20701,7 @@
                 <a:latin typeface="Times New Roman"/>
                 <a:ea typeface="宋体"/>
               </a:rPr>
-              <a:t>SE = \sqrt{\frac{SSE}{n - k - 1}}（衡量单个预测值偏离真实值平均距离的绝对指标，SE 越小精度越高）。</a:t>
+              <a:t>SE = √((SSE) / (n - k - 1))（衡量单个预测值偏离真实值平均距离的绝对指标，SE 越小精度越高）。</a:t>
             </a:r>
           </a:p>
         </p:txBody>
@@ -20758,7 +20758,7 @@
                 <a:latin typeface="Times New Roman"/>
                 <a:ea typeface="宋体"/>
               </a:rPr>
-              <a:t>  ★ 核心要点：t 检验排除虚假偶然相关，确保进入企业决策支持系统的自变量具有扎实的因果显著性。</a:t>
+              <a:t>★ 核心要点：t 检验排除虚假偶然相关，确保进入企业决策支持系统的自变量具有扎实的因果显著性。</a:t>
             </a:r>
           </a:p>
         </p:txBody>
